--- a/docs/poster/variants/v22.pptx
+++ b/docs/poster/variants/v22.pptx
@@ -4349,6 +4349,90 @@
               </a:spcAft>
             </a:pPr>
             <a:r>
+              <a:rPr sz="6200" b="1">
+                <a:solidFill>
+                  <a:srgbClr val="1B7A55"/>
+                </a:solidFill>
+                <a:latin typeface="Georgia"/>
+              </a:rPr>
+              <a:t>14</a:t>
+            </a:r>
+          </a:p>
+        </p:txBody>
+      </p:sp>
+      <p:sp>
+        <p:nvSpPr>
+          <p:cNvPr id="32" name="TextBox 31"/>
+          <p:cNvSpPr txBox="1"/>
+          <p:nvPr/>
+        </p:nvSpPr>
+        <p:spPr>
+          <a:xfrm>
+            <a:off x="731520" y="12752577"/>
+            <a:ext cx="20482560" cy="365760"/>
+          </a:xfrm>
+          <a:prstGeom prst="rect">
+            <a:avLst/>
+          </a:prstGeom>
+          <a:noFill/>
+        </p:spPr>
+        <p:txBody>
+          <a:bodyPr wrap="square" lIns="0" rIns="0" tIns="0" bIns="0">
+            <a:spAutoFit/>
+          </a:bodyPr>
+          <a:lstStyle/>
+          <a:p>
+            <a:pPr algn="l">
+              <a:lnSpc>
+                <a:spcPct val="122000"/>
+              </a:lnSpc>
+              <a:spcAft>
+                <a:spcPts val="600"/>
+              </a:spcAft>
+            </a:pPr>
+            <a:r>
+              <a:rPr sz="1500" b="0">
+                <a:solidFill>
+                  <a:srgbClr val="5C6B62"/>
+                </a:solidFill>
+                <a:latin typeface="Arial"/>
+              </a:rPr>
+              <a:t>analysis tools the planner can choose from</a:t>
+            </a:r>
+          </a:p>
+        </p:txBody>
+      </p:sp>
+      <p:sp>
+        <p:nvSpPr>
+          <p:cNvPr id="33" name="TextBox 32"/>
+          <p:cNvSpPr txBox="1"/>
+          <p:nvPr/>
+        </p:nvSpPr>
+        <p:spPr>
+          <a:xfrm>
+            <a:off x="731520" y="13207491"/>
+            <a:ext cx="20482560" cy="365760"/>
+          </a:xfrm>
+          <a:prstGeom prst="rect">
+            <a:avLst/>
+          </a:prstGeom>
+          <a:noFill/>
+        </p:spPr>
+        <p:txBody>
+          <a:bodyPr wrap="square" lIns="0" rIns="0" tIns="0" bIns="0">
+            <a:spAutoFit/>
+          </a:bodyPr>
+          <a:lstStyle/>
+          <a:p>
+            <a:pPr algn="l">
+              <a:lnSpc>
+                <a:spcPct val="95000"/>
+              </a:lnSpc>
+              <a:spcAft>
+                <a:spcPts val="0"/>
+              </a:spcAft>
+            </a:pPr>
+            <a:r>
               <a:rPr sz="3200" b="1">
                 <a:solidFill>
                   <a:srgbClr val="1F3D2B"/>
@@ -4362,13 +4446,13 @@
       </p:sp>
       <p:sp>
         <p:nvSpPr>
-          <p:cNvPr id="32" name="Rectangle 31"/>
+          <p:cNvPr id="34" name="Rectangle 33"/>
           <p:cNvSpPr/>
           <p:nvPr/>
         </p:nvSpPr>
         <p:spPr>
           <a:xfrm>
-            <a:off x="731520" y="12477749"/>
+            <a:off x="731520" y="13735811"/>
             <a:ext cx="20482560" cy="27432"/>
           </a:xfrm>
           <a:prstGeom prst="rect">
@@ -4406,13 +4490,13 @@
       </p:sp>
       <p:sp>
         <p:nvSpPr>
-          <p:cNvPr id="33" name="TextBox 32"/>
+          <p:cNvPr id="35" name="TextBox 34"/>
           <p:cNvSpPr txBox="1"/>
           <p:nvPr/>
         </p:nvSpPr>
         <p:spPr>
           <a:xfrm>
-            <a:off x="731520" y="12806933"/>
+            <a:off x="731520" y="14064995"/>
             <a:ext cx="20482560" cy="365760"/>
           </a:xfrm>
           <a:prstGeom prst="rect">
@@ -4448,13 +4532,13 @@
       </p:sp>
       <p:sp>
         <p:nvSpPr>
-          <p:cNvPr id="34" name="TextBox 33"/>
+          <p:cNvPr id="36" name="TextBox 35"/>
           <p:cNvSpPr txBox="1"/>
           <p:nvPr/>
         </p:nvSpPr>
         <p:spPr>
           <a:xfrm>
-            <a:off x="731520" y="13884401"/>
+            <a:off x="731520" y="15142463"/>
             <a:ext cx="20482560" cy="365760"/>
           </a:xfrm>
           <a:prstGeom prst="rect">
@@ -4477,6 +4561,90 @@
               </a:spcAft>
             </a:pPr>
             <a:r>
+              <a:rPr sz="6200" b="1">
+                <a:solidFill>
+                  <a:srgbClr val="1B7A55"/>
+                </a:solidFill>
+                <a:latin typeface="Georgia"/>
+              </a:rPr>
+              <a:t>27</a:t>
+            </a:r>
+          </a:p>
+        </p:txBody>
+      </p:sp>
+      <p:sp>
+        <p:nvSpPr>
+          <p:cNvPr id="37" name="TextBox 36"/>
+          <p:cNvSpPr txBox="1"/>
+          <p:nvPr/>
+        </p:nvSpPr>
+        <p:spPr>
+          <a:xfrm>
+            <a:off x="731520" y="15945611"/>
+            <a:ext cx="20482560" cy="365760"/>
+          </a:xfrm>
+          <a:prstGeom prst="rect">
+            <a:avLst/>
+          </a:prstGeom>
+          <a:noFill/>
+        </p:spPr>
+        <p:txBody>
+          <a:bodyPr wrap="square" lIns="0" rIns="0" tIns="0" bIns="0">
+            <a:spAutoFit/>
+          </a:bodyPr>
+          <a:lstStyle/>
+          <a:p>
+            <a:pPr algn="l">
+              <a:lnSpc>
+                <a:spcPct val="122000"/>
+              </a:lnSpc>
+              <a:spcAft>
+                <a:spcPts val="600"/>
+              </a:spcAft>
+            </a:pPr>
+            <a:r>
+              <a:rPr sz="1500" b="0">
+                <a:solidFill>
+                  <a:srgbClr val="5C6B62"/>
+                </a:solidFill>
+                <a:latin typeface="Arial"/>
+              </a:rPr>
+              <a:t>distinct models trained, run, or rejected</a:t>
+            </a:r>
+          </a:p>
+        </p:txBody>
+      </p:sp>
+      <p:sp>
+        <p:nvSpPr>
+          <p:cNvPr id="38" name="TextBox 37"/>
+          <p:cNvSpPr txBox="1"/>
+          <p:nvPr/>
+        </p:nvSpPr>
+        <p:spPr>
+          <a:xfrm>
+            <a:off x="731520" y="16400525"/>
+            <a:ext cx="20482560" cy="365760"/>
+          </a:xfrm>
+          <a:prstGeom prst="rect">
+            <a:avLst/>
+          </a:prstGeom>
+          <a:noFill/>
+        </p:spPr>
+        <p:txBody>
+          <a:bodyPr wrap="square" lIns="0" rIns="0" tIns="0" bIns="0">
+            <a:spAutoFit/>
+          </a:bodyPr>
+          <a:lstStyle/>
+          <a:p>
+            <a:pPr algn="l">
+              <a:lnSpc>
+                <a:spcPct val="95000"/>
+              </a:lnSpc>
+              <a:spcAft>
+                <a:spcPts val="0"/>
+              </a:spcAft>
+            </a:pPr>
+            <a:r>
               <a:rPr sz="3200" b="1">
                 <a:solidFill>
                   <a:srgbClr val="1F3D2B"/>
@@ -4490,13 +4658,13 @@
       </p:sp>
       <p:sp>
         <p:nvSpPr>
-          <p:cNvPr id="35" name="Rectangle 34"/>
+          <p:cNvPr id="39" name="Rectangle 38"/>
           <p:cNvSpPr/>
           <p:nvPr/>
         </p:nvSpPr>
         <p:spPr>
           <a:xfrm>
-            <a:off x="731520" y="14412721"/>
+            <a:off x="731520" y="16928845"/>
             <a:ext cx="20482560" cy="27432"/>
           </a:xfrm>
           <a:prstGeom prst="rect">
@@ -4534,7 +4702,7 @@
       </p:sp>
       <p:pic>
         <p:nvPicPr>
-          <p:cNvPr id="36" name="Picture 35" descr="m_ledger.png"/>
+          <p:cNvPr id="40" name="Picture 39" descr="m_ledger.png"/>
           <p:cNvPicPr>
             <a:picLocks noChangeAspect="1"/>
           </p:cNvPicPr>
@@ -4548,7 +4716,7 @@
         </p:blipFill>
         <p:spPr>
           <a:xfrm>
-            <a:off x="731520" y="14741905"/>
+            <a:off x="731520" y="17258029"/>
             <a:ext cx="20482560" cy="3749040"/>
           </a:xfrm>
           <a:prstGeom prst="rect">
@@ -4558,13 +4726,13 @@
       </p:pic>
       <p:sp>
         <p:nvSpPr>
-          <p:cNvPr id="37" name="TextBox 36"/>
+          <p:cNvPr id="41" name="TextBox 40"/>
           <p:cNvSpPr txBox="1"/>
           <p:nvPr/>
         </p:nvSpPr>
         <p:spPr>
           <a:xfrm>
-            <a:off x="731520" y="18600673"/>
+            <a:off x="731520" y="21116797"/>
             <a:ext cx="20482560" cy="365760"/>
           </a:xfrm>
           <a:prstGeom prst="rect">
@@ -4600,13 +4768,13 @@
       </p:sp>
       <p:sp>
         <p:nvSpPr>
-          <p:cNvPr id="38" name="TextBox 37"/>
+          <p:cNvPr id="42" name="TextBox 41"/>
           <p:cNvSpPr txBox="1"/>
           <p:nvPr/>
         </p:nvSpPr>
         <p:spPr>
           <a:xfrm>
-            <a:off x="731520" y="19585939"/>
+            <a:off x="731520" y="22102063"/>
             <a:ext cx="20482560" cy="365760"/>
           </a:xfrm>
           <a:prstGeom prst="rect">
@@ -4642,13 +4810,13 @@
       </p:sp>
       <p:sp>
         <p:nvSpPr>
-          <p:cNvPr id="39" name="TextBox 38"/>
+          <p:cNvPr id="43" name="TextBox 42"/>
           <p:cNvSpPr txBox="1"/>
           <p:nvPr/>
         </p:nvSpPr>
         <p:spPr>
           <a:xfrm>
-            <a:off x="731520" y="20663407"/>
+            <a:off x="731520" y="23179531"/>
             <a:ext cx="20482560" cy="365760"/>
           </a:xfrm>
           <a:prstGeom prst="rect">
@@ -4684,13 +4852,13 @@
       </p:sp>
       <p:sp>
         <p:nvSpPr>
-          <p:cNvPr id="40" name="Rectangle 39"/>
+          <p:cNvPr id="44" name="Rectangle 43"/>
           <p:cNvSpPr/>
           <p:nvPr/>
         </p:nvSpPr>
         <p:spPr>
           <a:xfrm>
-            <a:off x="731520" y="21191728"/>
+            <a:off x="731520" y="23707851"/>
             <a:ext cx="20482560" cy="27432"/>
           </a:xfrm>
           <a:prstGeom prst="rect">
@@ -4728,13 +4896,13 @@
       </p:sp>
       <p:sp>
         <p:nvSpPr>
-          <p:cNvPr id="41" name="TextBox 40"/>
+          <p:cNvPr id="45" name="TextBox 44"/>
           <p:cNvSpPr txBox="1"/>
           <p:nvPr/>
         </p:nvSpPr>
         <p:spPr>
           <a:xfrm>
-            <a:off x="731520" y="21520912"/>
+            <a:off x="731520" y="24037035"/>
             <a:ext cx="20482560" cy="365760"/>
           </a:xfrm>
           <a:prstGeom prst="rect">
@@ -4770,13 +4938,13 @@
       </p:sp>
       <p:sp>
         <p:nvSpPr>
-          <p:cNvPr id="42" name="TextBox 41"/>
+          <p:cNvPr id="46" name="TextBox 45"/>
           <p:cNvSpPr txBox="1"/>
           <p:nvPr/>
         </p:nvSpPr>
         <p:spPr>
           <a:xfrm>
-            <a:off x="731520" y="22598380"/>
+            <a:off x="731520" y="25114504"/>
             <a:ext cx="20482560" cy="365760"/>
           </a:xfrm>
           <a:prstGeom prst="rect">
@@ -4799,6 +4967,90 @@
               </a:spcAft>
             </a:pPr>
             <a:r>
+              <a:rPr sz="6200" b="1">
+                <a:solidFill>
+                  <a:srgbClr val="1B7A55"/>
+                </a:solidFill>
+                <a:latin typeface="Georgia"/>
+              </a:rPr>
+              <a:t>92</a:t>
+            </a:r>
+          </a:p>
+        </p:txBody>
+      </p:sp>
+      <p:sp>
+        <p:nvSpPr>
+          <p:cNvPr id="47" name="TextBox 46"/>
+          <p:cNvSpPr txBox="1"/>
+          <p:nvPr/>
+        </p:nvSpPr>
+        <p:spPr>
+          <a:xfrm>
+            <a:off x="731520" y="25917652"/>
+            <a:ext cx="20482560" cy="365760"/>
+          </a:xfrm>
+          <a:prstGeom prst="rect">
+            <a:avLst/>
+          </a:prstGeom>
+          <a:noFill/>
+        </p:spPr>
+        <p:txBody>
+          <a:bodyPr wrap="square" lIns="0" rIns="0" tIns="0" bIns="0">
+            <a:spAutoFit/>
+          </a:bodyPr>
+          <a:lstStyle/>
+          <a:p>
+            <a:pPr algn="l">
+              <a:lnSpc>
+                <a:spcPct val="122000"/>
+              </a:lnSpc>
+              <a:spcAft>
+                <a:spcPts val="600"/>
+              </a:spcAft>
+            </a:pPr>
+            <a:r>
+              <a:rPr sz="1500" b="0">
+                <a:solidFill>
+                  <a:srgbClr val="5C6B62"/>
+                </a:solidFill>
+                <a:latin typeface="Arial"/>
+              </a:rPr>
+              <a:t>questions asked of a dataset so far</a:t>
+            </a:r>
+          </a:p>
+        </p:txBody>
+      </p:sp>
+      <p:sp>
+        <p:nvSpPr>
+          <p:cNvPr id="48" name="TextBox 47"/>
+          <p:cNvSpPr txBox="1"/>
+          <p:nvPr/>
+        </p:nvSpPr>
+        <p:spPr>
+          <a:xfrm>
+            <a:off x="731520" y="26372565"/>
+            <a:ext cx="20482560" cy="365760"/>
+          </a:xfrm>
+          <a:prstGeom prst="rect">
+            <a:avLst/>
+          </a:prstGeom>
+          <a:noFill/>
+        </p:spPr>
+        <p:txBody>
+          <a:bodyPr wrap="square" lIns="0" rIns="0" tIns="0" bIns="0">
+            <a:spAutoFit/>
+          </a:bodyPr>
+          <a:lstStyle/>
+          <a:p>
+            <a:pPr algn="l">
+              <a:lnSpc>
+                <a:spcPct val="95000"/>
+              </a:lnSpc>
+              <a:spcAft>
+                <a:spcPts val="0"/>
+              </a:spcAft>
+            </a:pPr>
+            <a:r>
               <a:rPr sz="3200" b="1">
                 <a:solidFill>
                   <a:srgbClr val="1F3D2B"/>
@@ -4812,13 +5064,13 @@
       </p:sp>
       <p:sp>
         <p:nvSpPr>
-          <p:cNvPr id="43" name="Rectangle 42"/>
+          <p:cNvPr id="49" name="Rectangle 48"/>
           <p:cNvSpPr/>
           <p:nvPr/>
         </p:nvSpPr>
         <p:spPr>
           <a:xfrm>
-            <a:off x="731520" y="23126700"/>
+            <a:off x="731520" y="26900886"/>
             <a:ext cx="20482560" cy="27432"/>
           </a:xfrm>
           <a:prstGeom prst="rect">
@@ -4856,13 +5108,13 @@
       </p:sp>
       <p:sp>
         <p:nvSpPr>
-          <p:cNvPr id="44" name="TextBox 43"/>
+          <p:cNvPr id="50" name="TextBox 49"/>
           <p:cNvSpPr txBox="1"/>
           <p:nvPr/>
         </p:nvSpPr>
         <p:spPr>
           <a:xfrm>
-            <a:off x="731520" y="23455884"/>
+            <a:off x="731520" y="27230070"/>
             <a:ext cx="20482560" cy="365760"/>
           </a:xfrm>
           <a:prstGeom prst="rect">
@@ -4898,13 +5150,13 @@
       </p:sp>
       <p:sp>
         <p:nvSpPr>
-          <p:cNvPr id="45" name="TextBox 44"/>
+          <p:cNvPr id="51" name="TextBox 50"/>
           <p:cNvSpPr txBox="1"/>
           <p:nvPr/>
         </p:nvSpPr>
         <p:spPr>
           <a:xfrm>
-            <a:off x="731520" y="24533352"/>
+            <a:off x="731520" y="28307538"/>
             <a:ext cx="20482560" cy="365760"/>
           </a:xfrm>
           <a:prstGeom prst="rect">
@@ -4940,13 +5192,13 @@
       </p:sp>
       <p:sp>
         <p:nvSpPr>
-          <p:cNvPr id="46" name="Rectangle 45"/>
+          <p:cNvPr id="52" name="Rectangle 51"/>
           <p:cNvSpPr/>
           <p:nvPr/>
         </p:nvSpPr>
         <p:spPr>
           <a:xfrm>
-            <a:off x="731520" y="25061672"/>
+            <a:off x="731520" y="28835858"/>
             <a:ext cx="20482560" cy="27432"/>
           </a:xfrm>
           <a:prstGeom prst="rect">
@@ -4984,13 +5236,13 @@
       </p:sp>
       <p:sp>
         <p:nvSpPr>
-          <p:cNvPr id="47" name="TextBox 46"/>
+          <p:cNvPr id="53" name="TextBox 52"/>
           <p:cNvSpPr txBox="1"/>
           <p:nvPr/>
         </p:nvSpPr>
         <p:spPr>
           <a:xfrm>
-            <a:off x="731520" y="25390856"/>
+            <a:off x="731520" y="29165042"/>
             <a:ext cx="20482560" cy="365760"/>
           </a:xfrm>
           <a:prstGeom prst="rect">
@@ -5026,13 +5278,13 @@
       </p:sp>
       <p:sp>
         <p:nvSpPr>
-          <p:cNvPr id="48" name="TextBox 47"/>
+          <p:cNvPr id="54" name="TextBox 53"/>
           <p:cNvSpPr txBox="1"/>
           <p:nvPr/>
         </p:nvSpPr>
         <p:spPr>
           <a:xfrm>
-            <a:off x="731520" y="26468324"/>
+            <a:off x="22677120" y="7785099"/>
             <a:ext cx="20482560" cy="365760"/>
           </a:xfrm>
           <a:prstGeom prst="rect">
@@ -5061,20 +5313,20 @@
                 </a:solidFill>
                 <a:latin typeface="Georgia"/>
               </a:rPr>
-              <a:t>Adding the next robot</a:t>
-            </a:r>
-          </a:p>
-        </p:txBody>
-      </p:sp>
-      <p:sp>
-        <p:nvSpPr>
-          <p:cNvPr id="49" name="Rectangle 48"/>
+              <a:t>Robots on the platform today</a:t>
+            </a:r>
+          </a:p>
+        </p:txBody>
+      </p:sp>
+      <p:sp>
+        <p:nvSpPr>
+          <p:cNvPr id="55" name="Rectangle 54"/>
           <p:cNvSpPr/>
           <p:nvPr/>
         </p:nvSpPr>
         <p:spPr>
           <a:xfrm>
-            <a:off x="731520" y="26996644"/>
+            <a:off x="22677120" y="8313419"/>
             <a:ext cx="20482560" cy="27432"/>
           </a:xfrm>
           <a:prstGeom prst="rect">
@@ -5112,13 +5364,13 @@
       </p:sp>
       <p:sp>
         <p:nvSpPr>
-          <p:cNvPr id="50" name="TextBox 49"/>
+          <p:cNvPr id="56" name="TextBox 55"/>
           <p:cNvSpPr txBox="1"/>
           <p:nvPr/>
         </p:nvSpPr>
         <p:spPr>
           <a:xfrm>
-            <a:off x="731520" y="27325828"/>
+            <a:off x="22677120" y="8642603"/>
             <a:ext cx="20482560" cy="365760"/>
           </a:xfrm>
           <a:prstGeom prst="rect">
@@ -5147,20 +5399,20 @@
                 </a:solidFill>
                 <a:latin typeface="Arial"/>
               </a:rPr>
-              <a:t>A new robot needs a project, an API key and a session start. The ingest contract is the same for every vehicle: start a session, post sensor batches and frames while driving, stop. The platform does not care what the robot is. The Unitree humanoid's project exists on this basis and is waiting on its first upload.</a:t>
-            </a:r>
-          </a:p>
-        </p:txBody>
-      </p:sp>
-      <p:sp>
-        <p:nvSpPr>
-          <p:cNvPr id="51" name="TextBox 50"/>
+              <a:t>Robot 241 is a tracked rover that drives crop rows and streams camera, GPS and two IMUs. The laser cart carries the weeder: a galvanometer laser, a down camera over the work zone and a forward camera. Ten projects sit on the platform and two of them have a robot reporting into them. Between those two vehicles, 2,686 frames in 26 drives.</a:t>
+            </a:r>
+          </a:p>
+        </p:txBody>
+      </p:sp>
+      <p:sp>
+        <p:nvSpPr>
+          <p:cNvPr id="57" name="TextBox 56"/>
           <p:cNvSpPr txBox="1"/>
           <p:nvPr/>
         </p:nvSpPr>
         <p:spPr>
           <a:xfrm>
-            <a:off x="22677120" y="7785099"/>
+            <a:off x="22677120" y="9720071"/>
             <a:ext cx="20482560" cy="365760"/>
           </a:xfrm>
           <a:prstGeom prst="rect">
@@ -5183,26 +5435,110 @@
               </a:spcAft>
             </a:pPr>
             <a:r>
-              <a:rPr sz="3200" b="1">
-                <a:solidFill>
-                  <a:srgbClr val="1F3D2B"/>
+              <a:rPr sz="6200" b="1">
+                <a:solidFill>
+                  <a:srgbClr val="1B7A55"/>
                 </a:solidFill>
                 <a:latin typeface="Georgia"/>
               </a:rPr>
-              <a:t>Robots on the platform today</a:t>
-            </a:r>
-          </a:p>
-        </p:txBody>
-      </p:sp>
-      <p:sp>
-        <p:nvSpPr>
-          <p:cNvPr id="52" name="Rectangle 51"/>
+              <a:t>1,389</a:t>
+            </a:r>
+          </a:p>
+        </p:txBody>
+      </p:sp>
+      <p:sp>
+        <p:nvSpPr>
+          <p:cNvPr id="58" name="TextBox 57"/>
+          <p:cNvSpPr txBox="1"/>
+          <p:nvPr/>
+        </p:nvSpPr>
+        <p:spPr>
+          <a:xfrm>
+            <a:off x="22677120" y="10523219"/>
+            <a:ext cx="20482560" cy="365760"/>
+          </a:xfrm>
+          <a:prstGeom prst="rect">
+            <a:avLst/>
+          </a:prstGeom>
+          <a:noFill/>
+        </p:spPr>
+        <p:txBody>
+          <a:bodyPr wrap="square" lIns="0" rIns="0" tIns="0" bIns="0">
+            <a:spAutoFit/>
+          </a:bodyPr>
+          <a:lstStyle/>
+          <a:p>
+            <a:pPr algn="l">
+              <a:lnSpc>
+                <a:spcPct val="122000"/>
+              </a:lnSpc>
+              <a:spcAft>
+                <a:spcPts val="600"/>
+              </a:spcAft>
+            </a:pPr>
+            <a:r>
+              <a:rPr sz="1500" b="0">
+                <a:solidFill>
+                  <a:srgbClr val="5C6B62"/>
+                </a:solidFill>
+                <a:latin typeface="Arial"/>
+              </a:rPr>
+              <a:t>joystick commands through the platform</a:t>
+            </a:r>
+          </a:p>
+        </p:txBody>
+      </p:sp>
+      <p:sp>
+        <p:nvSpPr>
+          <p:cNvPr id="59" name="TextBox 58"/>
+          <p:cNvSpPr txBox="1"/>
+          <p:nvPr/>
+        </p:nvSpPr>
+        <p:spPr>
+          <a:xfrm>
+            <a:off x="22677120" y="10978133"/>
+            <a:ext cx="20482560" cy="365760"/>
+          </a:xfrm>
+          <a:prstGeom prst="rect">
+            <a:avLst/>
+          </a:prstGeom>
+          <a:noFill/>
+        </p:spPr>
+        <p:txBody>
+          <a:bodyPr wrap="square" lIns="0" rIns="0" tIns="0" bIns="0">
+            <a:spAutoFit/>
+          </a:bodyPr>
+          <a:lstStyle/>
+          <a:p>
+            <a:pPr algn="l">
+              <a:lnSpc>
+                <a:spcPct val="95000"/>
+              </a:lnSpc>
+              <a:spcAft>
+                <a:spcPts val="0"/>
+              </a:spcAft>
+            </a:pPr>
+            <a:r>
+              <a:rPr sz="3200" b="1">
+                <a:solidFill>
+                  <a:srgbClr val="1F3D2B"/>
+                </a:solidFill>
+                <a:latin typeface="Georgia"/>
+              </a:rPr>
+              <a:t>Driving a robot from a browser</a:t>
+            </a:r>
+          </a:p>
+        </p:txBody>
+      </p:sp>
+      <p:sp>
+        <p:nvSpPr>
+          <p:cNvPr id="60" name="Rectangle 59"/>
           <p:cNvSpPr/>
           <p:nvPr/>
         </p:nvSpPr>
         <p:spPr>
           <a:xfrm>
-            <a:off x="22677120" y="8313419"/>
+            <a:off x="22677120" y="11506453"/>
             <a:ext cx="20482560" cy="27432"/>
           </a:xfrm>
           <a:prstGeom prst="rect">
@@ -5240,13 +5576,13 @@
       </p:sp>
       <p:sp>
         <p:nvSpPr>
-          <p:cNvPr id="53" name="TextBox 52"/>
+          <p:cNvPr id="61" name="TextBox 60"/>
           <p:cNvSpPr txBox="1"/>
           <p:nvPr/>
         </p:nvSpPr>
         <p:spPr>
           <a:xfrm>
-            <a:off x="22677120" y="8642603"/>
+            <a:off x="22677120" y="11835637"/>
             <a:ext cx="20482560" cy="365760"/>
           </a:xfrm>
           <a:prstGeom prst="rect">
@@ -5275,20 +5611,20 @@
                 </a:solidFill>
                 <a:latin typeface="Arial"/>
               </a:rPr>
-              <a:t>Robot 241 is a tracked rover that drives crop rows and streams camera, GPS and two IMUs. The laser cart carries the weeder: a galvanometer laser, a down camera over the work zone and a forward camera. A Unitree humanoid has a project and has uploaded nothing yet. Between them the two ground vehicles have recorded 2,686 frames in 26 drives.</a:t>
-            </a:r>
-          </a:p>
-        </p:txBody>
-      </p:sp>
-      <p:sp>
-        <p:nvSpPr>
-          <p:cNvPr id="54" name="TextBox 53"/>
+              <a:t>A signed-in user opens the 241 project and clicks Drive. The platform reverse-proxies the robot's own console over the lab tailnet, so the rover is driven from a plain browser with no VPN client. 1,389 joystick commands have gone through that path. Two gates sit in front of it: the platform's Google login, then the robot's own password.</a:t>
+            </a:r>
+          </a:p>
+        </p:txBody>
+      </p:sp>
+      <p:sp>
+        <p:nvSpPr>
+          <p:cNvPr id="62" name="TextBox 61"/>
           <p:cNvSpPr txBox="1"/>
           <p:nvPr/>
         </p:nvSpPr>
         <p:spPr>
           <a:xfrm>
-            <a:off x="22677120" y="10014457"/>
+            <a:off x="22677120" y="12913105"/>
             <a:ext cx="20482560" cy="365760"/>
           </a:xfrm>
           <a:prstGeom prst="rect">
@@ -5317,20 +5653,20 @@
                 </a:solidFill>
                 <a:latin typeface="Georgia"/>
               </a:rPr>
-              <a:t>Driving a robot from a browser</a:t>
-            </a:r>
-          </a:p>
-        </p:txBody>
-      </p:sp>
-      <p:sp>
-        <p:nvSpPr>
-          <p:cNvPr id="55" name="Rectangle 54"/>
+              <a:t>Left alone for fifteen rounds</a:t>
+            </a:r>
+          </a:p>
+        </p:txBody>
+      </p:sp>
+      <p:sp>
+        <p:nvSpPr>
+          <p:cNvPr id="63" name="Rectangle 62"/>
           <p:cNvSpPr/>
           <p:nvPr/>
         </p:nvSpPr>
         <p:spPr>
           <a:xfrm>
-            <a:off x="22677120" y="10542777"/>
+            <a:off x="22677120" y="13441425"/>
             <a:ext cx="20482560" cy="27432"/>
           </a:xfrm>
           <a:prstGeom prst="rect">
@@ -5366,15 +5702,81 @@
           </a:p>
         </p:txBody>
       </p:sp>
-      <p:sp>
-        <p:nvSpPr>
-          <p:cNvPr id="56" name="TextBox 55"/>
+      <p:pic>
+        <p:nvPicPr>
+          <p:cNvPr id="64" name="Picture 63" descr="f_rounds.png"/>
+          <p:cNvPicPr>
+            <a:picLocks noChangeAspect="1"/>
+          </p:cNvPicPr>
+          <p:nvPr/>
+        </p:nvPicPr>
+        <p:blipFill>
+          <a:blip r:embed="rId3"/>
+          <a:stretch>
+            <a:fillRect/>
+          </a:stretch>
+        </p:blipFill>
+        <p:spPr>
+          <a:xfrm>
+            <a:off x="22677120" y="13770609"/>
+            <a:ext cx="20482560" cy="4663440"/>
+          </a:xfrm>
+          <a:prstGeom prst="rect">
+            <a:avLst/>
+          </a:prstGeom>
+        </p:spPr>
+      </p:pic>
+      <p:sp>
+        <p:nvSpPr>
+          <p:cNvPr id="65" name="TextBox 64"/>
           <p:cNvSpPr txBox="1"/>
           <p:nvPr/>
         </p:nvSpPr>
         <p:spPr>
           <a:xfrm>
-            <a:off x="22677120" y="10871961"/>
+            <a:off x="22677120" y="18543777"/>
+            <a:ext cx="20482560" cy="365760"/>
+          </a:xfrm>
+          <a:prstGeom prst="rect">
+            <a:avLst/>
+          </a:prstGeom>
+          <a:noFill/>
+        </p:spPr>
+        <p:txBody>
+          <a:bodyPr wrap="square" lIns="0" rIns="0" tIns="0" bIns="0">
+            <a:spAutoFit/>
+          </a:bodyPr>
+          <a:lstStyle/>
+          <a:p>
+            <a:pPr algn="l">
+              <a:lnSpc>
+                <a:spcPct val="118000"/>
+              </a:lnSpc>
+              <a:spcAft>
+                <a:spcPts val="0"/>
+              </a:spcAft>
+            </a:pPr>
+            <a:r>
+              <a:rPr sz="1500" b="0">
+                <a:solidFill>
+                  <a:srgbClr val="5C6B62"/>
+                </a:solidFill>
+                <a:latin typeface="Arial"/>
+              </a:rPr>
+              <a:t>Figure 2.  (f) Fifteen unattended rounds on a fixed holdout. (g) Round 15's exact dataset, three ways. The first two marks differ only in the starting weights, so their gap is the warm-start chain; the third is the recipe the campaign ran, whose wall-clock cap truncates the cosine, with its three seeds drawn behind it. Sigma throughout is that recipe's own seed spread, 0.0040 over three seeds, propagated to the difference being quoted. Completing the schedule is not the fix -- the second mark sits below the third.</a:t>
+            </a:r>
+          </a:p>
+        </p:txBody>
+      </p:sp>
+      <p:sp>
+        <p:nvSpPr>
+          <p:cNvPr id="66" name="TextBox 65"/>
+          <p:cNvSpPr txBox="1"/>
+          <p:nvPr/>
+        </p:nvSpPr>
+        <p:spPr>
+          <a:xfrm>
+            <a:off x="22677120" y="19529043"/>
             <a:ext cx="20482560" cy="365760"/>
           </a:xfrm>
           <a:prstGeom prst="rect">
@@ -5403,20 +5805,20 @@
                 </a:solidFill>
                 <a:latin typeface="Arial"/>
               </a:rPr>
-              <a:t>A signed-in user opens the 241 project and clicks Drive. The platform reverse-proxies the robot's own console over the lab tailnet, so the rover is driven from a plain browser with no VPN client. 1,389 joystick commands have gone through that path. Two gates sit in front of it: the platform's Google login, then the robot's own password.</a:t>
-            </a:r>
-          </a:p>
-        </p:txBody>
-      </p:sp>
-      <p:sp>
-        <p:nvSpPr>
-          <p:cNvPr id="57" name="TextBox 56"/>
+              <a:t>Two cluster jobs, one collecting and one training, ran fifteen rounds against the locked registry with nobody in the room. Each round searched public sources, filtered what it found, merged, trained and evaluated. Every round reported success. Accuracy fell for fifteen rounds. This part is built and is switched off today.</a:t>
+            </a:r>
+          </a:p>
+        </p:txBody>
+      </p:sp>
+      <p:sp>
+        <p:nvSpPr>
+          <p:cNvPr id="67" name="TextBox 66"/>
           <p:cNvSpPr txBox="1"/>
           <p:nvPr/>
         </p:nvSpPr>
         <p:spPr>
           <a:xfrm>
-            <a:off x="22677120" y="11949429"/>
+            <a:off x="22677120" y="20606512"/>
             <a:ext cx="20482560" cy="365760"/>
           </a:xfrm>
           <a:prstGeom prst="rect">
@@ -5445,20 +5847,20 @@
                 </a:solidFill>
                 <a:latin typeface="Georgia"/>
               </a:rPr>
-              <a:t>Left alone for fifteen rounds</a:t>
-            </a:r>
-          </a:p>
-        </p:txBody>
-      </p:sp>
-      <p:sp>
-        <p:nvSpPr>
-          <p:cNvPr id="58" name="Rectangle 57"/>
+              <a:t>Inside the platform</a:t>
+            </a:r>
+          </a:p>
+        </p:txBody>
+      </p:sp>
+      <p:sp>
+        <p:nvSpPr>
+          <p:cNvPr id="68" name="Rectangle 67"/>
           <p:cNvSpPr/>
           <p:nvPr/>
         </p:nvSpPr>
         <p:spPr>
           <a:xfrm>
-            <a:off x="22677120" y="12477749"/>
+            <a:off x="22677120" y="21134832"/>
             <a:ext cx="20482560" cy="27432"/>
           </a:xfrm>
           <a:prstGeom prst="rect">
@@ -5496,22 +5898,22 @@
       </p:sp>
       <p:pic>
         <p:nvPicPr>
-          <p:cNvPr id="59" name="Picture 58" descr="f_rounds.png"/>
+          <p:cNvPr id="69" name="Picture 68" descr="n_system.png"/>
           <p:cNvPicPr>
             <a:picLocks noChangeAspect="1"/>
           </p:cNvPicPr>
           <p:nvPr/>
         </p:nvPicPr>
         <p:blipFill>
-          <a:blip r:embed="rId3"/>
+          <a:blip r:embed="rId4"/>
           <a:stretch>
             <a:fillRect/>
           </a:stretch>
         </p:blipFill>
         <p:spPr>
           <a:xfrm>
-            <a:off x="22677120" y="12806933"/>
-            <a:ext cx="20482560" cy="4663440"/>
+            <a:off x="22677120" y="21464016"/>
+            <a:ext cx="20482560" cy="3383280"/>
           </a:xfrm>
           <a:prstGeom prst="rect">
             <a:avLst/>
@@ -5520,13 +5922,13 @@
       </p:pic>
       <p:sp>
         <p:nvSpPr>
-          <p:cNvPr id="60" name="TextBox 59"/>
+          <p:cNvPr id="70" name="TextBox 69"/>
           <p:cNvSpPr txBox="1"/>
           <p:nvPr/>
         </p:nvSpPr>
         <p:spPr>
           <a:xfrm>
-            <a:off x="22677120" y="17580101"/>
+            <a:off x="22677120" y="24957024"/>
             <a:ext cx="20482560" cy="365760"/>
           </a:xfrm>
           <a:prstGeom prst="rect">
@@ -5555,20 +5957,20 @@
                 </a:solidFill>
                 <a:latin typeface="Arial"/>
               </a:rPr>
-              <a:t>Figure 2.  (f) Fifteen unattended rounds on a fixed holdout. (g) Round 15's exact dataset, three ways. The first two marks differ only in the starting weights, so their gap is the warm-start chain; the third is the recipe the campaign ran, whose wall-clock cap truncates the cosine, with its three seeds drawn behind it. Sigma throughout is that recipe's own seed spread, 0.0040 over three seeds, propagated to the difference being quoted. Completing the schedule is not the fix -- the second mark sits below the third.</a:t>
-            </a:r>
-          </a:p>
-        </p:txBody>
-      </p:sp>
-      <p:sp>
-        <p:nvSpPr>
-          <p:cNvPr id="61" name="TextBox 60"/>
+              <a:t>Figure 3.  The path as built, from a camera in a crop row to a checkpoint on the cluster. Every stage has run. Three qualifications ride on it. The collector and trainer are paused after a stop-loss on 2026-08-29. The supervisor is advisory and nothing it says is applied. And the last link is not closed: no robot frame has entered training, because none of them is labelled yet.</a:t>
+            </a:r>
+          </a:p>
+        </p:txBody>
+      </p:sp>
+      <p:sp>
+        <p:nvSpPr>
+          <p:cNvPr id="71" name="TextBox 70"/>
           <p:cNvSpPr txBox="1"/>
           <p:nvPr/>
         </p:nvSpPr>
         <p:spPr>
           <a:xfrm>
-            <a:off x="22677120" y="18565367"/>
+            <a:off x="22677120" y="25717500"/>
             <a:ext cx="20482560" cy="365760"/>
           </a:xfrm>
           <a:prstGeom prst="rect">
@@ -5597,20 +5999,20 @@
                 </a:solidFill>
                 <a:latin typeface="Arial"/>
               </a:rPr>
-              <a:t>Two cluster jobs, one collecting and one training, ran fifteen rounds against the locked registry with nobody in the room. Each round searched public sources, filtered what it found, merged, trained and evaluated. Every round reported success. Accuracy fell for fifteen rounds. This part is built and is switched off today.</a:t>
-            </a:r>
-          </a:p>
-        </p:txBody>
-      </p:sp>
-      <p:sp>
-        <p:nvSpPr>
-          <p:cNvPr id="62" name="TextBox 61"/>
+              <a:t>Every stage from a camera in a crop row to a checkpoint on the cluster has run. The dashboard and registry run on a lab server; GPU jobs queue on PSC Bridges-2. The collector and trainer are paused after a stop-loss on 2026-08-29. The supervisor is advisory and nothing it says is applied.</a:t>
+            </a:r>
+          </a:p>
+        </p:txBody>
+      </p:sp>
+      <p:sp>
+        <p:nvSpPr>
+          <p:cNvPr id="72" name="TextBox 71"/>
           <p:cNvSpPr txBox="1"/>
           <p:nvPr/>
         </p:nvSpPr>
         <p:spPr>
           <a:xfrm>
-            <a:off x="22677120" y="19642836"/>
+            <a:off x="22677120" y="26794968"/>
             <a:ext cx="20482560" cy="365760"/>
           </a:xfrm>
           <a:prstGeom prst="rect">
@@ -5639,20 +6041,20 @@
                 </a:solidFill>
                 <a:latin typeface="Georgia"/>
               </a:rPr>
-              <a:t>Inside the platform</a:t>
-            </a:r>
-          </a:p>
-        </p:txBody>
-      </p:sp>
-      <p:sp>
-        <p:nvSpPr>
-          <p:cNvPr id="63" name="Rectangle 62"/>
+              <a:t>Only one robot has the button</a:t>
+            </a:r>
+          </a:p>
+        </p:txBody>
+      </p:sp>
+      <p:sp>
+        <p:nvSpPr>
+          <p:cNvPr id="73" name="Rectangle 72"/>
           <p:cNvSpPr/>
           <p:nvPr/>
         </p:nvSpPr>
         <p:spPr>
           <a:xfrm>
-            <a:off x="22677120" y="20171156"/>
+            <a:off x="22677120" y="27323288"/>
             <a:ext cx="20482560" cy="27432"/>
           </a:xfrm>
           <a:prstGeom prst="rect">
@@ -5688,81 +6090,15 @@
           </a:p>
         </p:txBody>
       </p:sp>
-      <p:pic>
-        <p:nvPicPr>
-          <p:cNvPr id="64" name="Picture 63" descr="n_system.png"/>
-          <p:cNvPicPr>
-            <a:picLocks noChangeAspect="1"/>
-          </p:cNvPicPr>
-          <p:nvPr/>
-        </p:nvPicPr>
-        <p:blipFill>
-          <a:blip r:embed="rId4"/>
-          <a:stretch>
-            <a:fillRect/>
-          </a:stretch>
-        </p:blipFill>
-        <p:spPr>
-          <a:xfrm>
-            <a:off x="22677120" y="20500340"/>
-            <a:ext cx="20482560" cy="3383280"/>
-          </a:xfrm>
-          <a:prstGeom prst="rect">
-            <a:avLst/>
-          </a:prstGeom>
-        </p:spPr>
-      </p:pic>
-      <p:sp>
-        <p:nvSpPr>
-          <p:cNvPr id="65" name="TextBox 64"/>
+      <p:sp>
+        <p:nvSpPr>
+          <p:cNvPr id="74" name="TextBox 73"/>
           <p:cNvSpPr txBox="1"/>
           <p:nvPr/>
         </p:nvSpPr>
         <p:spPr>
           <a:xfrm>
-            <a:off x="22677120" y="23993348"/>
-            <a:ext cx="20482560" cy="365760"/>
-          </a:xfrm>
-          <a:prstGeom prst="rect">
-            <a:avLst/>
-          </a:prstGeom>
-          <a:noFill/>
-        </p:spPr>
-        <p:txBody>
-          <a:bodyPr wrap="square" lIns="0" rIns="0" tIns="0" bIns="0">
-            <a:spAutoFit/>
-          </a:bodyPr>
-          <a:lstStyle/>
-          <a:p>
-            <a:pPr algn="l">
-              <a:lnSpc>
-                <a:spcPct val="118000"/>
-              </a:lnSpc>
-              <a:spcAft>
-                <a:spcPts val="0"/>
-              </a:spcAft>
-            </a:pPr>
-            <a:r>
-              <a:rPr sz="1500" b="0">
-                <a:solidFill>
-                  <a:srgbClr val="5C6B62"/>
-                </a:solidFill>
-                <a:latin typeface="Arial"/>
-              </a:rPr>
-              <a:t>Figure 3.  The path as built, from a camera in a crop row to a checkpoint on the cluster. Every stage has run. Three qualifications ride on it. The collector and trainer are paused after a stop-loss on 2026-08-29. The supervisor is advisory and nothing it says is applied. And the last link is not closed: no robot frame has entered training, because none of them is labelled yet.</a:t>
-            </a:r>
-          </a:p>
-        </p:txBody>
-      </p:sp>
-      <p:sp>
-        <p:nvSpPr>
-          <p:cNvPr id="66" name="TextBox 65"/>
-          <p:cNvSpPr txBox="1"/>
-          <p:nvPr/>
-        </p:nvSpPr>
-        <p:spPr>
-          <a:xfrm>
-            <a:off x="22677120" y="24753824"/>
+            <a:off x="22677120" y="27652472"/>
             <a:ext cx="20482560" cy="365760"/>
           </a:xfrm>
           <a:prstGeom prst="rect">
@@ -5791,69 +6127,27 @@
                 </a:solidFill>
                 <a:latin typeface="Arial"/>
               </a:rPr>
-              <a:t>Every stage from a camera in a crop row to a checkpoint on the cluster has run. The dashboard and registry run on a lab server; GPU jobs queue on PSC Bridges-2. The collector and trainer are paused after a stop-loss on 2026-08-29. The supervisor is advisory and nothing it says is applied.</a:t>
-            </a:r>
-          </a:p>
-        </p:txBody>
-      </p:sp>
-      <p:sp>
-        <p:nvSpPr>
-          <p:cNvPr id="67" name="TextBox 66"/>
-          <p:cNvSpPr txBox="1"/>
-          <p:nvPr/>
-        </p:nvSpPr>
-        <p:spPr>
-          <a:xfrm>
-            <a:off x="22677120" y="25831292"/>
-            <a:ext cx="20482560" cy="365760"/>
-          </a:xfrm>
-          <a:prstGeom prst="rect">
-            <a:avLst/>
-          </a:prstGeom>
-          <a:noFill/>
-        </p:spPr>
-        <p:txBody>
-          <a:bodyPr wrap="square" lIns="0" rIns="0" tIns="0" bIns="0">
-            <a:spAutoFit/>
-          </a:bodyPr>
-          <a:lstStyle/>
-          <a:p>
-            <a:pPr algn="l">
-              <a:lnSpc>
-                <a:spcPct val="95000"/>
-              </a:lnSpc>
-              <a:spcAft>
-                <a:spcPts val="0"/>
-              </a:spcAft>
-            </a:pPr>
-            <a:r>
-              <a:rPr sz="3200" b="1">
-                <a:solidFill>
-                  <a:srgbClr val="1F3D2B"/>
-                </a:solidFill>
-                <a:latin typeface="Georgia"/>
-              </a:rPr>
-              <a:t>Only one robot has the button</a:t>
-            </a:r>
-          </a:p>
-        </p:txBody>
-      </p:sp>
-      <p:sp>
-        <p:nvSpPr>
-          <p:cNvPr id="68" name="Rectangle 67"/>
+              <a:t>The Drive button appears on the 241 project and not on the laser cart's, because the allow-list holds one target. The rover has been dark since 2026-08-28: the platform answers a drive request today with its own offline page. The cart has never been drivable from the platform.</a:t>
+            </a:r>
+          </a:p>
+        </p:txBody>
+      </p:sp>
+      <p:sp>
+        <p:nvSpPr>
+          <p:cNvPr id="75" name="Rectangle 74"/>
           <p:cNvSpPr/>
           <p:nvPr/>
         </p:nvSpPr>
         <p:spPr>
           <a:xfrm>
-            <a:off x="22677120" y="26359612"/>
-            <a:ext cx="20482560" cy="27432"/>
+            <a:off x="731520" y="30632400"/>
+            <a:ext cx="42428160" cy="20116"/>
           </a:xfrm>
           <a:prstGeom prst="rect">
             <a:avLst/>
           </a:prstGeom>
           <a:solidFill>
-            <a:srgbClr val="1B7A55"/>
+            <a:srgbClr val="CBD3CC"/>
           </a:solidFill>
           <a:ln>
             <a:noFill/>
@@ -5884,221 +6178,7 @@
       </p:sp>
       <p:sp>
         <p:nvSpPr>
-          <p:cNvPr id="69" name="TextBox 68"/>
-          <p:cNvSpPr txBox="1"/>
-          <p:nvPr/>
-        </p:nvSpPr>
-        <p:spPr>
-          <a:xfrm>
-            <a:off x="22677120" y="26688796"/>
-            <a:ext cx="20482560" cy="365760"/>
-          </a:xfrm>
-          <a:prstGeom prst="rect">
-            <a:avLst/>
-          </a:prstGeom>
-          <a:noFill/>
-        </p:spPr>
-        <p:txBody>
-          <a:bodyPr wrap="square" lIns="0" rIns="0" tIns="0" bIns="0">
-            <a:spAutoFit/>
-          </a:bodyPr>
-          <a:lstStyle/>
-          <a:p>
-            <a:pPr algn="l">
-              <a:lnSpc>
-                <a:spcPct val="122000"/>
-              </a:lnSpc>
-              <a:spcAft>
-                <a:spcPts val="1400"/>
-              </a:spcAft>
-            </a:pPr>
-            <a:r>
-              <a:rPr sz="1900" b="0">
-                <a:solidFill>
-                  <a:srgbClr val="1C2A22"/>
-                </a:solidFill>
-                <a:latin typeface="Arial"/>
-              </a:rPr>
-              <a:t>The Drive button appears on the 241 project and not on the laser cart's, because the allow-list holds one target. The rover has been dark since 2026-08-28: the platform answers a drive request today with its own offline page. The cart has never been drivable from the platform.</a:t>
-            </a:r>
-          </a:p>
-        </p:txBody>
-      </p:sp>
-      <p:sp>
-        <p:nvSpPr>
-          <p:cNvPr id="70" name="TextBox 69"/>
-          <p:cNvSpPr txBox="1"/>
-          <p:nvPr/>
-        </p:nvSpPr>
-        <p:spPr>
-          <a:xfrm>
-            <a:off x="22677120" y="27766264"/>
-            <a:ext cx="20482560" cy="365760"/>
-          </a:xfrm>
-          <a:prstGeom prst="rect">
-            <a:avLst/>
-          </a:prstGeom>
-          <a:noFill/>
-        </p:spPr>
-        <p:txBody>
-          <a:bodyPr wrap="square" lIns="0" rIns="0" tIns="0" bIns="0">
-            <a:spAutoFit/>
-          </a:bodyPr>
-          <a:lstStyle/>
-          <a:p>
-            <a:pPr algn="l">
-              <a:lnSpc>
-                <a:spcPct val="95000"/>
-              </a:lnSpc>
-              <a:spcAft>
-                <a:spcPts val="0"/>
-              </a:spcAft>
-            </a:pPr>
-            <a:r>
-              <a:rPr sz="3200" b="1">
-                <a:solidFill>
-                  <a:srgbClr val="1F3D2B"/>
-                </a:solidFill>
-                <a:latin typeface="Georgia"/>
-              </a:rPr>
-              <a:t>Which decisions a model makes</a:t>
-            </a:r>
-          </a:p>
-        </p:txBody>
-      </p:sp>
-      <p:sp>
-        <p:nvSpPr>
-          <p:cNvPr id="71" name="Rectangle 70"/>
-          <p:cNvSpPr/>
-          <p:nvPr/>
-        </p:nvSpPr>
-        <p:spPr>
-          <a:xfrm>
-            <a:off x="22677120" y="28294584"/>
-            <a:ext cx="20482560" cy="27432"/>
-          </a:xfrm>
-          <a:prstGeom prst="rect">
-            <a:avLst/>
-          </a:prstGeom>
-          <a:solidFill>
-            <a:srgbClr val="1B7A55"/>
-          </a:solidFill>
-          <a:ln>
-            <a:noFill/>
-          </a:ln>
-          <a:effectLst/>
-        </p:spPr>
-        <p:style>
-          <a:lnRef idx="1">
-            <a:schemeClr val="accent1"/>
-          </a:lnRef>
-          <a:fillRef idx="3">
-            <a:schemeClr val="accent1"/>
-          </a:fillRef>
-          <a:effectRef idx="2">
-            <a:schemeClr val="accent1"/>
-          </a:effectRef>
-          <a:fontRef idx="minor">
-            <a:schemeClr val="lt1"/>
-          </a:fontRef>
-        </p:style>
-        <p:txBody>
-          <a:bodyPr rtlCol="0" anchor="ctr"/>
-          <a:lstStyle/>
-          <a:p>
-            <a:pPr algn="ctr"/>
-          </a:p>
-        </p:txBody>
-      </p:sp>
-      <p:sp>
-        <p:nvSpPr>
-          <p:cNvPr id="72" name="TextBox 71"/>
-          <p:cNvSpPr txBox="1"/>
-          <p:nvPr/>
-        </p:nvSpPr>
-        <p:spPr>
-          <a:xfrm>
-            <a:off x="22677120" y="28623768"/>
-            <a:ext cx="20482560" cy="365760"/>
-          </a:xfrm>
-          <a:prstGeom prst="rect">
-            <a:avLst/>
-          </a:prstGeom>
-          <a:noFill/>
-        </p:spPr>
-        <p:txBody>
-          <a:bodyPr wrap="square" lIns="0" rIns="0" tIns="0" bIns="0">
-            <a:spAutoFit/>
-          </a:bodyPr>
-          <a:lstStyle/>
-          <a:p>
-            <a:pPr algn="l">
-              <a:lnSpc>
-                <a:spcPct val="122000"/>
-              </a:lnSpc>
-              <a:spcAft>
-                <a:spcPts val="1400"/>
-              </a:spcAft>
-            </a:pPr>
-            <a:r>
-              <a:rPr sz="1900" b="0">
-                <a:solidFill>
-                  <a:srgbClr val="1C2A22"/>
-                </a:solidFill>
-                <a:latin typeface="Arial"/>
-              </a:rPr>
-              <a:t>A language model decides what the collector goes after next, judges whether a candidate dataset is on topic, and reviews a finished step. Those run on the cluster, as batch jobs, on open weights. The lab box hosts only the small guide model, and a verdict produced there is marked in its own record as a draft that may not be reported.</a:t>
-            </a:r>
-          </a:p>
-        </p:txBody>
-      </p:sp>
-      <p:sp>
-        <p:nvSpPr>
-          <p:cNvPr id="73" name="Rectangle 72"/>
-          <p:cNvSpPr/>
-          <p:nvPr/>
-        </p:nvSpPr>
-        <p:spPr>
-          <a:xfrm>
-            <a:off x="731520" y="30632400"/>
-            <a:ext cx="42428160" cy="20116"/>
-          </a:xfrm>
-          <a:prstGeom prst="rect">
-            <a:avLst/>
-          </a:prstGeom>
-          <a:solidFill>
-            <a:srgbClr val="CBD3CC"/>
-          </a:solidFill>
-          <a:ln>
-            <a:noFill/>
-          </a:ln>
-          <a:effectLst/>
-        </p:spPr>
-        <p:style>
-          <a:lnRef idx="1">
-            <a:schemeClr val="accent1"/>
-          </a:lnRef>
-          <a:fillRef idx="3">
-            <a:schemeClr val="accent1"/>
-          </a:fillRef>
-          <a:effectRef idx="2">
-            <a:schemeClr val="accent1"/>
-          </a:effectRef>
-          <a:fontRef idx="minor">
-            <a:schemeClr val="lt1"/>
-          </a:fontRef>
-        </p:style>
-        <p:txBody>
-          <a:bodyPr rtlCol="0" anchor="ctr"/>
-          <a:lstStyle/>
-          <a:p>
-            <a:pPr algn="ctr"/>
-          </a:p>
-        </p:txBody>
-      </p:sp>
-      <p:sp>
-        <p:nvSpPr>
-          <p:cNvPr id="74" name="TextBox 73"/>
+          <p:cNvPr id="76" name="TextBox 75"/>
           <p:cNvSpPr txBox="1"/>
           <p:nvPr/>
         </p:nvSpPr>
@@ -6140,7 +6220,7 @@
       </p:sp>
       <p:sp>
         <p:nvSpPr>
-          <p:cNvPr id="75" name="TextBox 74"/>
+          <p:cNvPr id="77" name="TextBox 76"/>
           <p:cNvSpPr txBox="1"/>
           <p:nvPr/>
         </p:nvSpPr>
@@ -6182,7 +6262,7 @@
       </p:sp>
       <p:sp>
         <p:nvSpPr>
-          <p:cNvPr id="76" name="TextBox 75"/>
+          <p:cNvPr id="78" name="TextBox 77"/>
           <p:cNvSpPr txBox="1"/>
           <p:nvPr/>
         </p:nvSpPr>
